--- a/public/fun/pack/pptx/talk/발표템플릿_02_교육·강의_입춘날마루.pptx
+++ b/public/fun/pack/pptx/talk/발표템플릿_02_교육·강의_입춘날마루.pptx
@@ -3347,7 +3347,7 @@
             <a:r>
               <a:rPr sz="3600" b="1" i="0">
                 <a:solidFill>
-                  <a:srgbClr val="74591B"/>
+                  <a:srgbClr val="72591D"/>
                 </a:solidFill>
               </a:rPr>
               <a:t>발표 제목을 입력하세요</a:t>
@@ -3385,7 +3385,7 @@
             <a:r>
               <a:rPr sz="1700" b="0" i="1">
                 <a:solidFill>
-                  <a:srgbClr val="74591B"/>
+                  <a:srgbClr val="72591D"/>
                 </a:solidFill>
               </a:rPr>
               <a:t>오늘 배울 것은 세 가지입니다</a:t>
@@ -3460,7 +3460,7 @@
     <p:bg>
       <p:bgPr>
         <a:solidFill>
-          <a:srgbClr val="FBF7EE"/>
+          <a:srgbClr val="FCF9F3"/>
         </a:solidFill>
         <a:effectLst/>
       </p:bgPr>
@@ -3489,7 +3489,7 @@
           <a:noFill/>
           <a:ln w="28575">
             <a:solidFill>
-              <a:srgbClr val="C6992F"/>
+              <a:srgbClr val="DFAD3A"/>
             </a:solidFill>
           </a:ln>
         </p:spPr>
@@ -3518,7 +3518,7 @@
           <a:noFill/>
           <a:ln w="9525">
             <a:solidFill>
-              <a:srgbClr val="F5E9CC"/>
+              <a:srgbClr val="F7EDD4"/>
             </a:solidFill>
           </a:ln>
         </p:spPr>
@@ -3560,7 +3560,7 @@
             <a:r>
               <a:rPr sz="3000" b="1" i="0">
                 <a:solidFill>
-                  <a:srgbClr val="74591B"/>
+                  <a:srgbClr val="72591D"/>
                 </a:solidFill>
               </a:rPr>
               <a:t>목차</a:t>
@@ -3585,11 +3585,11 @@
             </a:avLst>
           </a:prstGeom>
           <a:solidFill>
-            <a:srgbClr val="FBF7EE"/>
+            <a:srgbClr val="FCF9F3"/>
           </a:solidFill>
           <a:ln w="12700">
             <a:solidFill>
-              <a:srgbClr val="F5E9CC"/>
+              <a:srgbClr val="F7EDD4"/>
             </a:solidFill>
           </a:ln>
         </p:spPr>
@@ -3616,7 +3616,7 @@
             <a:avLst/>
           </a:prstGeom>
           <a:solidFill>
-            <a:srgbClr val="C6992F"/>
+            <a:srgbClr val="DFAD3A"/>
           </a:solidFill>
           <a:ln>
             <a:noFill/>
@@ -3674,7 +3674,7 @@
             <a:r>
               <a:rPr sz="1800" b="1" i="0">
                 <a:solidFill>
-                  <a:srgbClr val="74591B"/>
+                  <a:srgbClr val="72591D"/>
                 </a:solidFill>
               </a:rPr>
               <a:t>오늘의 목표</a:t>
@@ -3737,11 +3737,11 @@
             </a:avLst>
           </a:prstGeom>
           <a:solidFill>
-            <a:srgbClr val="FBF7EE"/>
+            <a:srgbClr val="FCF9F3"/>
           </a:solidFill>
           <a:ln w="12700">
             <a:solidFill>
-              <a:srgbClr val="F5E9CC"/>
+              <a:srgbClr val="F7EDD4"/>
             </a:solidFill>
           </a:ln>
         </p:spPr>
@@ -3768,7 +3768,7 @@
             <a:avLst/>
           </a:prstGeom>
           <a:solidFill>
-            <a:srgbClr val="C6992F"/>
+            <a:srgbClr val="DFAD3A"/>
           </a:solidFill>
           <a:ln>
             <a:noFill/>
@@ -3826,7 +3826,7 @@
             <a:r>
               <a:rPr sz="1800" b="1" i="0">
                 <a:solidFill>
-                  <a:srgbClr val="74591B"/>
+                  <a:srgbClr val="72591D"/>
                 </a:solidFill>
               </a:rPr>
               <a:t>핵심 개념</a:t>
@@ -3889,11 +3889,11 @@
             </a:avLst>
           </a:prstGeom>
           <a:solidFill>
-            <a:srgbClr val="FBF7EE"/>
+            <a:srgbClr val="FCF9F3"/>
           </a:solidFill>
           <a:ln w="12700">
             <a:solidFill>
-              <a:srgbClr val="F5E9CC"/>
+              <a:srgbClr val="F7EDD4"/>
             </a:solidFill>
           </a:ln>
         </p:spPr>
@@ -3920,7 +3920,7 @@
             <a:avLst/>
           </a:prstGeom>
           <a:solidFill>
-            <a:srgbClr val="C6992F"/>
+            <a:srgbClr val="DFAD3A"/>
           </a:solidFill>
           <a:ln>
             <a:noFill/>
@@ -3978,7 +3978,7 @@
             <a:r>
               <a:rPr sz="1800" b="1" i="0">
                 <a:solidFill>
-                  <a:srgbClr val="74591B"/>
+                  <a:srgbClr val="72591D"/>
                 </a:solidFill>
               </a:rPr>
               <a:t>실습과 예시</a:t>
@@ -4041,11 +4041,11 @@
             </a:avLst>
           </a:prstGeom>
           <a:solidFill>
-            <a:srgbClr val="FBF7EE"/>
+            <a:srgbClr val="FCF9F3"/>
           </a:solidFill>
           <a:ln w="12700">
             <a:solidFill>
-              <a:srgbClr val="F5E9CC"/>
+              <a:srgbClr val="F7EDD4"/>
             </a:solidFill>
           </a:ln>
         </p:spPr>
@@ -4072,7 +4072,7 @@
             <a:avLst/>
           </a:prstGeom>
           <a:solidFill>
-            <a:srgbClr val="C6992F"/>
+            <a:srgbClr val="DFAD3A"/>
           </a:solidFill>
           <a:ln>
             <a:noFill/>
@@ -4130,7 +4130,7 @@
             <a:r>
               <a:rPr sz="1800" b="1" i="0">
                 <a:solidFill>
-                  <a:srgbClr val="74591B"/>
+                  <a:srgbClr val="72591D"/>
                 </a:solidFill>
               </a:rPr>
               <a:t>정리와 질문</a:t>
@@ -4190,7 +4190,7 @@
     <p:bg>
       <p:bgPr>
         <a:solidFill>
-          <a:srgbClr val="FBF7EE"/>
+          <a:srgbClr val="FCF9F3"/>
         </a:solidFill>
         <a:effectLst/>
       </p:bgPr>
@@ -4219,7 +4219,7 @@
           <a:noFill/>
           <a:ln w="28575">
             <a:solidFill>
-              <a:srgbClr val="C6992F"/>
+              <a:srgbClr val="DFAD3A"/>
             </a:solidFill>
           </a:ln>
         </p:spPr>
@@ -4248,7 +4248,7 @@
           <a:noFill/>
           <a:ln w="9525">
             <a:solidFill>
-              <a:srgbClr val="F5E9CC"/>
+              <a:srgbClr val="F7EDD4"/>
             </a:solidFill>
           </a:ln>
         </p:spPr>
@@ -4290,7 +4290,7 @@
             <a:r>
               <a:rPr sz="3000" b="1" i="0">
                 <a:solidFill>
-                  <a:srgbClr val="74591B"/>
+                  <a:srgbClr val="72591D"/>
                 </a:solidFill>
               </a:rPr>
               <a:t>핵심 메시지</a:t>
@@ -4328,7 +4328,7 @@
             <a:r>
               <a:rPr sz="2600" b="1" i="0">
                 <a:solidFill>
-                  <a:srgbClr val="74591B"/>
+                  <a:srgbClr val="72591D"/>
                 </a:solidFill>
               </a:rPr>
               <a:t>한 문장으로 말하면 — 여기에 핵심 메시지를 입력하세요</a:t>
@@ -4353,11 +4353,11 @@
             </a:avLst>
           </a:prstGeom>
           <a:solidFill>
-            <a:srgbClr val="FBF7EE"/>
+            <a:srgbClr val="FCF9F3"/>
           </a:solidFill>
           <a:ln w="15875">
             <a:solidFill>
-              <a:srgbClr val="F5E9CC"/>
+              <a:srgbClr val="F7EDD4"/>
             </a:solidFill>
           </a:ln>
         </p:spPr>
@@ -4384,7 +4384,7 @@
             <a:avLst/>
           </a:prstGeom>
           <a:solidFill>
-            <a:srgbClr val="C6992F"/>
+            <a:srgbClr val="DFAD3A"/>
           </a:solidFill>
           <a:ln>
             <a:noFill/>
@@ -4442,7 +4442,7 @@
             <a:r>
               <a:rPr sz="1800" b="1" i="0">
                 <a:solidFill>
-                  <a:srgbClr val="74591B"/>
+                  <a:srgbClr val="72591D"/>
                 </a:solidFill>
               </a:rPr>
               <a:t>알아야 할 것</a:t>
@@ -4520,11 +4520,11 @@
             </a:avLst>
           </a:prstGeom>
           <a:solidFill>
-            <a:srgbClr val="FBF7EE"/>
+            <a:srgbClr val="FCF9F3"/>
           </a:solidFill>
           <a:ln w="15875">
             <a:solidFill>
-              <a:srgbClr val="F5E9CC"/>
+              <a:srgbClr val="F7EDD4"/>
             </a:solidFill>
           </a:ln>
         </p:spPr>
@@ -4551,7 +4551,7 @@
             <a:avLst/>
           </a:prstGeom>
           <a:solidFill>
-            <a:srgbClr val="C6992F"/>
+            <a:srgbClr val="DFAD3A"/>
           </a:solidFill>
           <a:ln>
             <a:noFill/>
@@ -4609,7 +4609,7 @@
             <a:r>
               <a:rPr sz="1800" b="1" i="0">
                 <a:solidFill>
-                  <a:srgbClr val="74591B"/>
+                  <a:srgbClr val="72591D"/>
                 </a:solidFill>
               </a:rPr>
               <a:t>해 볼 것</a:t>
@@ -4687,11 +4687,11 @@
             </a:avLst>
           </a:prstGeom>
           <a:solidFill>
-            <a:srgbClr val="FBF7EE"/>
+            <a:srgbClr val="FCF9F3"/>
           </a:solidFill>
           <a:ln w="15875">
             <a:solidFill>
-              <a:srgbClr val="F5E9CC"/>
+              <a:srgbClr val="F7EDD4"/>
             </a:solidFill>
           </a:ln>
         </p:spPr>
@@ -4718,7 +4718,7 @@
             <a:avLst/>
           </a:prstGeom>
           <a:solidFill>
-            <a:srgbClr val="C6992F"/>
+            <a:srgbClr val="DFAD3A"/>
           </a:solidFill>
           <a:ln>
             <a:noFill/>
@@ -4776,7 +4776,7 @@
             <a:r>
               <a:rPr sz="1800" b="1" i="0">
                 <a:solidFill>
-                  <a:srgbClr val="74591B"/>
+                  <a:srgbClr val="72591D"/>
                 </a:solidFill>
               </a:rPr>
               <a:t>기억할 것</a:t>
@@ -4851,7 +4851,7 @@
     <p:bg>
       <p:bgPr>
         <a:solidFill>
-          <a:srgbClr val="FBF7EE"/>
+          <a:srgbClr val="FCF9F3"/>
         </a:solidFill>
         <a:effectLst/>
       </p:bgPr>
@@ -4880,7 +4880,7 @@
           <a:noFill/>
           <a:ln w="28575">
             <a:solidFill>
-              <a:srgbClr val="C6992F"/>
+              <a:srgbClr val="DFAD3A"/>
             </a:solidFill>
           </a:ln>
         </p:spPr>
@@ -4909,7 +4909,7 @@
           <a:noFill/>
           <a:ln w="9525">
             <a:solidFill>
-              <a:srgbClr val="F5E9CC"/>
+              <a:srgbClr val="F7EDD4"/>
             </a:solidFill>
           </a:ln>
         </p:spPr>
@@ -4951,7 +4951,7 @@
             <a:r>
               <a:rPr sz="3000" b="1" i="0">
                 <a:solidFill>
-                  <a:srgbClr val="74591B"/>
+                  <a:srgbClr val="72591D"/>
                 </a:solidFill>
               </a:rPr>
               <a:t>한눈에 비교</a:t>
@@ -4976,11 +4976,11 @@
             </a:avLst>
           </a:prstGeom>
           <a:solidFill>
-            <a:srgbClr val="FBF7EE"/>
+            <a:srgbClr val="FCF9F3"/>
           </a:solidFill>
           <a:ln w="12700">
             <a:solidFill>
-              <a:srgbClr val="F5E9CC"/>
+              <a:srgbClr val="F7EDD4"/>
             </a:solidFill>
           </a:ln>
         </p:spPr>
@@ -5009,7 +5009,7 @@
             </a:avLst>
           </a:prstGeom>
           <a:solidFill>
-            <a:srgbClr val="C6992F"/>
+            <a:srgbClr val="DFAD3A"/>
           </a:solidFill>
           <a:ln>
             <a:noFill/>
@@ -5161,11 +5161,11 @@
             </a:avLst>
           </a:prstGeom>
           <a:solidFill>
-            <a:srgbClr val="F5E9CC"/>
+            <a:srgbClr val="F7EDD4"/>
           </a:solidFill>
           <a:ln w="12700">
             <a:solidFill>
-              <a:srgbClr val="F5E9CC"/>
+              <a:srgbClr val="F7EDD4"/>
             </a:solidFill>
           </a:ln>
         </p:spPr>
@@ -5194,7 +5194,7 @@
             </a:avLst>
           </a:prstGeom>
           <a:solidFill>
-            <a:srgbClr val="74591B"/>
+            <a:srgbClr val="72591D"/>
           </a:solidFill>
           <a:ln>
             <a:noFill/>
@@ -5343,7 +5343,7 @@
     <p:bg>
       <p:bgPr>
         <a:solidFill>
-          <a:srgbClr val="FBF7EE"/>
+          <a:srgbClr val="FCF9F3"/>
         </a:solidFill>
         <a:effectLst/>
       </p:bgPr>
@@ -5372,7 +5372,7 @@
           <a:noFill/>
           <a:ln w="28575">
             <a:solidFill>
-              <a:srgbClr val="C6992F"/>
+              <a:srgbClr val="DFAD3A"/>
             </a:solidFill>
           </a:ln>
         </p:spPr>
@@ -5401,7 +5401,7 @@
           <a:noFill/>
           <a:ln w="9525">
             <a:solidFill>
-              <a:srgbClr val="F5E9CC"/>
+              <a:srgbClr val="F7EDD4"/>
             </a:solidFill>
           </a:ln>
         </p:spPr>
@@ -5443,7 +5443,7 @@
             <a:r>
               <a:rPr sz="3000" b="1" i="0">
                 <a:solidFill>
-                  <a:srgbClr val="74591B"/>
+                  <a:srgbClr val="72591D"/>
                 </a:solidFill>
               </a:rPr>
               <a:t>일정·현황</a:t>
@@ -5495,30 +5495,30 @@
                   <a:tcPr anchor="ctr" marL="73152" marR="73152">
                     <a:lnL w="9525" cap="flat" cmpd="sng" algn="ctr">
                       <a:solidFill>
-                        <a:srgbClr val="C6992F"/>
+                        <a:srgbClr val="DFAD3A"/>
                       </a:solidFill>
                       <a:prstDash val="solid"/>
                     </a:lnL>
                     <a:lnR w="9525" cap="flat" cmpd="sng" algn="ctr">
                       <a:solidFill>
-                        <a:srgbClr val="C6992F"/>
+                        <a:srgbClr val="DFAD3A"/>
                       </a:solidFill>
                       <a:prstDash val="solid"/>
                     </a:lnR>
                     <a:lnT w="9525" cap="flat" cmpd="sng" algn="ctr">
                       <a:solidFill>
-                        <a:srgbClr val="C6992F"/>
+                        <a:srgbClr val="DFAD3A"/>
                       </a:solidFill>
                       <a:prstDash val="solid"/>
                     </a:lnT>
                     <a:lnB w="9525" cap="flat" cmpd="sng" algn="ctr">
                       <a:solidFill>
-                        <a:srgbClr val="C6992F"/>
+                        <a:srgbClr val="DFAD3A"/>
                       </a:solidFill>
                       <a:prstDash val="solid"/>
                     </a:lnB>
                     <a:solidFill>
-                      <a:srgbClr val="C6992F"/>
+                      <a:srgbClr val="DFAD3A"/>
                     </a:solidFill>
                   </a:tcPr>
                 </a:tc>
@@ -5541,30 +5541,30 @@
                   <a:tcPr anchor="ctr" marL="73152" marR="73152">
                     <a:lnL w="9525" cap="flat" cmpd="sng" algn="ctr">
                       <a:solidFill>
-                        <a:srgbClr val="C6992F"/>
+                        <a:srgbClr val="DFAD3A"/>
                       </a:solidFill>
                       <a:prstDash val="solid"/>
                     </a:lnL>
                     <a:lnR w="9525" cap="flat" cmpd="sng" algn="ctr">
                       <a:solidFill>
-                        <a:srgbClr val="C6992F"/>
+                        <a:srgbClr val="DFAD3A"/>
                       </a:solidFill>
                       <a:prstDash val="solid"/>
                     </a:lnR>
                     <a:lnT w="9525" cap="flat" cmpd="sng" algn="ctr">
                       <a:solidFill>
-                        <a:srgbClr val="C6992F"/>
+                        <a:srgbClr val="DFAD3A"/>
                       </a:solidFill>
                       <a:prstDash val="solid"/>
                     </a:lnT>
                     <a:lnB w="9525" cap="flat" cmpd="sng" algn="ctr">
                       <a:solidFill>
-                        <a:srgbClr val="C6992F"/>
+                        <a:srgbClr val="DFAD3A"/>
                       </a:solidFill>
                       <a:prstDash val="solid"/>
                     </a:lnB>
                     <a:solidFill>
-                      <a:srgbClr val="C6992F"/>
+                      <a:srgbClr val="DFAD3A"/>
                     </a:solidFill>
                   </a:tcPr>
                 </a:tc>
@@ -5587,30 +5587,30 @@
                   <a:tcPr anchor="ctr" marL="73152" marR="73152">
                     <a:lnL w="9525" cap="flat" cmpd="sng" algn="ctr">
                       <a:solidFill>
-                        <a:srgbClr val="C6992F"/>
+                        <a:srgbClr val="DFAD3A"/>
                       </a:solidFill>
                       <a:prstDash val="solid"/>
                     </a:lnL>
                     <a:lnR w="9525" cap="flat" cmpd="sng" algn="ctr">
                       <a:solidFill>
-                        <a:srgbClr val="C6992F"/>
+                        <a:srgbClr val="DFAD3A"/>
                       </a:solidFill>
                       <a:prstDash val="solid"/>
                     </a:lnR>
                     <a:lnT w="9525" cap="flat" cmpd="sng" algn="ctr">
                       <a:solidFill>
-                        <a:srgbClr val="C6992F"/>
+                        <a:srgbClr val="DFAD3A"/>
                       </a:solidFill>
                       <a:prstDash val="solid"/>
                     </a:lnT>
                     <a:lnB w="9525" cap="flat" cmpd="sng" algn="ctr">
                       <a:solidFill>
-                        <a:srgbClr val="C6992F"/>
+                        <a:srgbClr val="DFAD3A"/>
                       </a:solidFill>
                       <a:prstDash val="solid"/>
                     </a:lnB>
                     <a:solidFill>
-                      <a:srgbClr val="C6992F"/>
+                      <a:srgbClr val="DFAD3A"/>
                     </a:solidFill>
                   </a:tcPr>
                 </a:tc>
@@ -5633,30 +5633,30 @@
                   <a:tcPr anchor="ctr" marL="73152" marR="73152">
                     <a:lnL w="9525" cap="flat" cmpd="sng" algn="ctr">
                       <a:solidFill>
-                        <a:srgbClr val="C6992F"/>
+                        <a:srgbClr val="DFAD3A"/>
                       </a:solidFill>
                       <a:prstDash val="solid"/>
                     </a:lnL>
                     <a:lnR w="9525" cap="flat" cmpd="sng" algn="ctr">
                       <a:solidFill>
-                        <a:srgbClr val="C6992F"/>
+                        <a:srgbClr val="DFAD3A"/>
                       </a:solidFill>
                       <a:prstDash val="solid"/>
                     </a:lnR>
                     <a:lnT w="9525" cap="flat" cmpd="sng" algn="ctr">
                       <a:solidFill>
-                        <a:srgbClr val="C6992F"/>
+                        <a:srgbClr val="DFAD3A"/>
                       </a:solidFill>
                       <a:prstDash val="solid"/>
                     </a:lnT>
                     <a:lnB w="9525" cap="flat" cmpd="sng" algn="ctr">
                       <a:solidFill>
-                        <a:srgbClr val="C6992F"/>
+                        <a:srgbClr val="DFAD3A"/>
                       </a:solidFill>
                       <a:prstDash val="solid"/>
                     </a:lnB>
                     <a:solidFill>
-                      <a:srgbClr val="C6992F"/>
+                      <a:srgbClr val="DFAD3A"/>
                     </a:solidFill>
                   </a:tcPr>
                 </a:tc>
@@ -5671,7 +5671,7 @@
                       <a:r>
                         <a:rPr sz="1500" b="1">
                           <a:solidFill>
-                            <a:srgbClr val="74591B"/>
+                            <a:srgbClr val="72591D"/>
                           </a:solidFill>
                         </a:rPr>
                         <a:t>1</a:t>
@@ -5681,30 +5681,30 @@
                   <a:tcPr anchor="ctr" marL="73152" marR="73152">
                     <a:lnL w="9525" cap="flat" cmpd="sng" algn="ctr">
                       <a:solidFill>
-                        <a:srgbClr val="F5E9CC"/>
+                        <a:srgbClr val="F7EDD4"/>
                       </a:solidFill>
                       <a:prstDash val="solid"/>
                     </a:lnL>
                     <a:lnR w="9525" cap="flat" cmpd="sng" algn="ctr">
                       <a:solidFill>
-                        <a:srgbClr val="F5E9CC"/>
+                        <a:srgbClr val="F7EDD4"/>
                       </a:solidFill>
                       <a:prstDash val="solid"/>
                     </a:lnR>
                     <a:lnT w="9525" cap="flat" cmpd="sng" algn="ctr">
                       <a:solidFill>
-                        <a:srgbClr val="F5E9CC"/>
+                        <a:srgbClr val="F7EDD4"/>
                       </a:solidFill>
                       <a:prstDash val="solid"/>
                     </a:lnT>
                     <a:lnB w="9525" cap="flat" cmpd="sng" algn="ctr">
                       <a:solidFill>
-                        <a:srgbClr val="F5E9CC"/>
+                        <a:srgbClr val="F7EDD4"/>
                       </a:solidFill>
                       <a:prstDash val="solid"/>
                     </a:lnB>
                     <a:solidFill>
-                      <a:srgbClr val="F5E9CC"/>
+                      <a:srgbClr val="F7EDD4"/>
                     </a:solidFill>
                   </a:tcPr>
                 </a:tc>
@@ -5727,25 +5727,25 @@
                   <a:tcPr anchor="ctr" marL="73152" marR="73152">
                     <a:lnL w="9525" cap="flat" cmpd="sng" algn="ctr">
                       <a:solidFill>
-                        <a:srgbClr val="F5E9CC"/>
+                        <a:srgbClr val="F7EDD4"/>
                       </a:solidFill>
                       <a:prstDash val="solid"/>
                     </a:lnL>
                     <a:lnR w="9525" cap="flat" cmpd="sng" algn="ctr">
                       <a:solidFill>
-                        <a:srgbClr val="F5E9CC"/>
+                        <a:srgbClr val="F7EDD4"/>
                       </a:solidFill>
                       <a:prstDash val="solid"/>
                     </a:lnR>
                     <a:lnT w="9525" cap="flat" cmpd="sng" algn="ctr">
                       <a:solidFill>
-                        <a:srgbClr val="F5E9CC"/>
+                        <a:srgbClr val="F7EDD4"/>
                       </a:solidFill>
                       <a:prstDash val="solid"/>
                     </a:lnT>
                     <a:lnB w="9525" cap="flat" cmpd="sng" algn="ctr">
                       <a:solidFill>
-                        <a:srgbClr val="F5E9CC"/>
+                        <a:srgbClr val="F7EDD4"/>
                       </a:solidFill>
                       <a:prstDash val="solid"/>
                     </a:lnB>
@@ -5773,25 +5773,25 @@
                   <a:tcPr anchor="ctr" marL="73152" marR="73152">
                     <a:lnL w="9525" cap="flat" cmpd="sng" algn="ctr">
                       <a:solidFill>
-                        <a:srgbClr val="F5E9CC"/>
+                        <a:srgbClr val="F7EDD4"/>
                       </a:solidFill>
                       <a:prstDash val="solid"/>
                     </a:lnL>
                     <a:lnR w="9525" cap="flat" cmpd="sng" algn="ctr">
                       <a:solidFill>
-                        <a:srgbClr val="F5E9CC"/>
+                        <a:srgbClr val="F7EDD4"/>
                       </a:solidFill>
                       <a:prstDash val="solid"/>
                     </a:lnR>
                     <a:lnT w="9525" cap="flat" cmpd="sng" algn="ctr">
                       <a:solidFill>
-                        <a:srgbClr val="F5E9CC"/>
+                        <a:srgbClr val="F7EDD4"/>
                       </a:solidFill>
                       <a:prstDash val="solid"/>
                     </a:lnT>
                     <a:lnB w="9525" cap="flat" cmpd="sng" algn="ctr">
                       <a:solidFill>
-                        <a:srgbClr val="F5E9CC"/>
+                        <a:srgbClr val="F7EDD4"/>
                       </a:solidFill>
                       <a:prstDash val="solid"/>
                     </a:lnB>
@@ -5819,25 +5819,25 @@
                   <a:tcPr anchor="ctr" marL="73152" marR="73152">
                     <a:lnL w="9525" cap="flat" cmpd="sng" algn="ctr">
                       <a:solidFill>
-                        <a:srgbClr val="F5E9CC"/>
+                        <a:srgbClr val="F7EDD4"/>
                       </a:solidFill>
                       <a:prstDash val="solid"/>
                     </a:lnL>
                     <a:lnR w="9525" cap="flat" cmpd="sng" algn="ctr">
                       <a:solidFill>
-                        <a:srgbClr val="F5E9CC"/>
+                        <a:srgbClr val="F7EDD4"/>
                       </a:solidFill>
                       <a:prstDash val="solid"/>
                     </a:lnR>
                     <a:lnT w="9525" cap="flat" cmpd="sng" algn="ctr">
                       <a:solidFill>
-                        <a:srgbClr val="F5E9CC"/>
+                        <a:srgbClr val="F7EDD4"/>
                       </a:solidFill>
                       <a:prstDash val="solid"/>
                     </a:lnT>
                     <a:lnB w="9525" cap="flat" cmpd="sng" algn="ctr">
                       <a:solidFill>
-                        <a:srgbClr val="F5E9CC"/>
+                        <a:srgbClr val="F7EDD4"/>
                       </a:solidFill>
                       <a:prstDash val="solid"/>
                     </a:lnB>
@@ -5857,7 +5857,7 @@
                       <a:r>
                         <a:rPr sz="1500" b="1">
                           <a:solidFill>
-                            <a:srgbClr val="74591B"/>
+                            <a:srgbClr val="72591D"/>
                           </a:solidFill>
                         </a:rPr>
                         <a:t>2</a:t>
@@ -5867,30 +5867,30 @@
                   <a:tcPr anchor="ctr" marL="73152" marR="73152">
                     <a:lnL w="9525" cap="flat" cmpd="sng" algn="ctr">
                       <a:solidFill>
-                        <a:srgbClr val="F5E9CC"/>
+                        <a:srgbClr val="F7EDD4"/>
                       </a:solidFill>
                       <a:prstDash val="solid"/>
                     </a:lnL>
                     <a:lnR w="9525" cap="flat" cmpd="sng" algn="ctr">
                       <a:solidFill>
-                        <a:srgbClr val="F5E9CC"/>
+                        <a:srgbClr val="F7EDD4"/>
                       </a:solidFill>
                       <a:prstDash val="solid"/>
                     </a:lnR>
                     <a:lnT w="9525" cap="flat" cmpd="sng" algn="ctr">
                       <a:solidFill>
-                        <a:srgbClr val="F5E9CC"/>
+                        <a:srgbClr val="F7EDD4"/>
                       </a:solidFill>
                       <a:prstDash val="solid"/>
                     </a:lnT>
                     <a:lnB w="9525" cap="flat" cmpd="sng" algn="ctr">
                       <a:solidFill>
-                        <a:srgbClr val="F5E9CC"/>
+                        <a:srgbClr val="F7EDD4"/>
                       </a:solidFill>
                       <a:prstDash val="solid"/>
                     </a:lnB>
                     <a:solidFill>
-                      <a:srgbClr val="F5E9CC"/>
+                      <a:srgbClr val="F7EDD4"/>
                     </a:solidFill>
                   </a:tcPr>
                 </a:tc>
@@ -5913,30 +5913,30 @@
                   <a:tcPr anchor="ctr" marL="73152" marR="73152">
                     <a:lnL w="9525" cap="flat" cmpd="sng" algn="ctr">
                       <a:solidFill>
-                        <a:srgbClr val="F5E9CC"/>
+                        <a:srgbClr val="F7EDD4"/>
                       </a:solidFill>
                       <a:prstDash val="solid"/>
                     </a:lnL>
                     <a:lnR w="9525" cap="flat" cmpd="sng" algn="ctr">
                       <a:solidFill>
-                        <a:srgbClr val="F5E9CC"/>
+                        <a:srgbClr val="F7EDD4"/>
                       </a:solidFill>
                       <a:prstDash val="solid"/>
                     </a:lnR>
                     <a:lnT w="9525" cap="flat" cmpd="sng" algn="ctr">
                       <a:solidFill>
-                        <a:srgbClr val="F5E9CC"/>
+                        <a:srgbClr val="F7EDD4"/>
                       </a:solidFill>
                       <a:prstDash val="solid"/>
                     </a:lnT>
                     <a:lnB w="9525" cap="flat" cmpd="sng" algn="ctr">
                       <a:solidFill>
-                        <a:srgbClr val="F5E9CC"/>
+                        <a:srgbClr val="F7EDD4"/>
                       </a:solidFill>
                       <a:prstDash val="solid"/>
                     </a:lnB>
                     <a:solidFill>
-                      <a:srgbClr val="FBF7EE"/>
+                      <a:srgbClr val="FCF9F3"/>
                     </a:solidFill>
                   </a:tcPr>
                 </a:tc>
@@ -5959,30 +5959,30 @@
                   <a:tcPr anchor="ctr" marL="73152" marR="73152">
                     <a:lnL w="9525" cap="flat" cmpd="sng" algn="ctr">
                       <a:solidFill>
-                        <a:srgbClr val="F5E9CC"/>
+                        <a:srgbClr val="F7EDD4"/>
                       </a:solidFill>
                       <a:prstDash val="solid"/>
                     </a:lnL>
                     <a:lnR w="9525" cap="flat" cmpd="sng" algn="ctr">
                       <a:solidFill>
-                        <a:srgbClr val="F5E9CC"/>
+                        <a:srgbClr val="F7EDD4"/>
                       </a:solidFill>
                       <a:prstDash val="solid"/>
                     </a:lnR>
                     <a:lnT w="9525" cap="flat" cmpd="sng" algn="ctr">
                       <a:solidFill>
-                        <a:srgbClr val="F5E9CC"/>
+                        <a:srgbClr val="F7EDD4"/>
                       </a:solidFill>
                       <a:prstDash val="solid"/>
                     </a:lnT>
                     <a:lnB w="9525" cap="flat" cmpd="sng" algn="ctr">
                       <a:solidFill>
-                        <a:srgbClr val="F5E9CC"/>
+                        <a:srgbClr val="F7EDD4"/>
                       </a:solidFill>
                       <a:prstDash val="solid"/>
                     </a:lnB>
                     <a:solidFill>
-                      <a:srgbClr val="FBF7EE"/>
+                      <a:srgbClr val="FCF9F3"/>
                     </a:solidFill>
                   </a:tcPr>
                 </a:tc>
@@ -6005,30 +6005,30 @@
                   <a:tcPr anchor="ctr" marL="73152" marR="73152">
                     <a:lnL w="9525" cap="flat" cmpd="sng" algn="ctr">
                       <a:solidFill>
-                        <a:srgbClr val="F5E9CC"/>
+                        <a:srgbClr val="F7EDD4"/>
                       </a:solidFill>
                       <a:prstDash val="solid"/>
                     </a:lnL>
                     <a:lnR w="9525" cap="flat" cmpd="sng" algn="ctr">
                       <a:solidFill>
-                        <a:srgbClr val="F5E9CC"/>
+                        <a:srgbClr val="F7EDD4"/>
                       </a:solidFill>
                       <a:prstDash val="solid"/>
                     </a:lnR>
                     <a:lnT w="9525" cap="flat" cmpd="sng" algn="ctr">
                       <a:solidFill>
-                        <a:srgbClr val="F5E9CC"/>
+                        <a:srgbClr val="F7EDD4"/>
                       </a:solidFill>
                       <a:prstDash val="solid"/>
                     </a:lnT>
                     <a:lnB w="9525" cap="flat" cmpd="sng" algn="ctr">
                       <a:solidFill>
-                        <a:srgbClr val="F5E9CC"/>
+                        <a:srgbClr val="F7EDD4"/>
                       </a:solidFill>
                       <a:prstDash val="solid"/>
                     </a:lnB>
                     <a:solidFill>
-                      <a:srgbClr val="FBF7EE"/>
+                      <a:srgbClr val="FCF9F3"/>
                     </a:solidFill>
                   </a:tcPr>
                 </a:tc>
@@ -6043,7 +6043,7 @@
                       <a:r>
                         <a:rPr sz="1500" b="1">
                           <a:solidFill>
-                            <a:srgbClr val="74591B"/>
+                            <a:srgbClr val="72591D"/>
                           </a:solidFill>
                         </a:rPr>
                         <a:t>3</a:t>
@@ -6053,30 +6053,30 @@
                   <a:tcPr anchor="ctr" marL="73152" marR="73152">
                     <a:lnL w="9525" cap="flat" cmpd="sng" algn="ctr">
                       <a:solidFill>
-                        <a:srgbClr val="F5E9CC"/>
+                        <a:srgbClr val="F7EDD4"/>
                       </a:solidFill>
                       <a:prstDash val="solid"/>
                     </a:lnL>
                     <a:lnR w="9525" cap="flat" cmpd="sng" algn="ctr">
                       <a:solidFill>
-                        <a:srgbClr val="F5E9CC"/>
+                        <a:srgbClr val="F7EDD4"/>
                       </a:solidFill>
                       <a:prstDash val="solid"/>
                     </a:lnR>
                     <a:lnT w="9525" cap="flat" cmpd="sng" algn="ctr">
                       <a:solidFill>
-                        <a:srgbClr val="F5E9CC"/>
+                        <a:srgbClr val="F7EDD4"/>
                       </a:solidFill>
                       <a:prstDash val="solid"/>
                     </a:lnT>
                     <a:lnB w="9525" cap="flat" cmpd="sng" algn="ctr">
                       <a:solidFill>
-                        <a:srgbClr val="F5E9CC"/>
+                        <a:srgbClr val="F7EDD4"/>
                       </a:solidFill>
                       <a:prstDash val="solid"/>
                     </a:lnB>
                     <a:solidFill>
-                      <a:srgbClr val="F5E9CC"/>
+                      <a:srgbClr val="F7EDD4"/>
                     </a:solidFill>
                   </a:tcPr>
                 </a:tc>
@@ -6099,25 +6099,25 @@
                   <a:tcPr anchor="ctr" marL="73152" marR="73152">
                     <a:lnL w="9525" cap="flat" cmpd="sng" algn="ctr">
                       <a:solidFill>
-                        <a:srgbClr val="F5E9CC"/>
+                        <a:srgbClr val="F7EDD4"/>
                       </a:solidFill>
                       <a:prstDash val="solid"/>
                     </a:lnL>
                     <a:lnR w="9525" cap="flat" cmpd="sng" algn="ctr">
                       <a:solidFill>
-                        <a:srgbClr val="F5E9CC"/>
+                        <a:srgbClr val="F7EDD4"/>
                       </a:solidFill>
                       <a:prstDash val="solid"/>
                     </a:lnR>
                     <a:lnT w="9525" cap="flat" cmpd="sng" algn="ctr">
                       <a:solidFill>
-                        <a:srgbClr val="F5E9CC"/>
+                        <a:srgbClr val="F7EDD4"/>
                       </a:solidFill>
                       <a:prstDash val="solid"/>
                     </a:lnT>
                     <a:lnB w="9525" cap="flat" cmpd="sng" algn="ctr">
                       <a:solidFill>
-                        <a:srgbClr val="F5E9CC"/>
+                        <a:srgbClr val="F7EDD4"/>
                       </a:solidFill>
                       <a:prstDash val="solid"/>
                     </a:lnB>
@@ -6145,25 +6145,25 @@
                   <a:tcPr anchor="ctr" marL="73152" marR="73152">
                     <a:lnL w="9525" cap="flat" cmpd="sng" algn="ctr">
                       <a:solidFill>
-                        <a:srgbClr val="F5E9CC"/>
+                        <a:srgbClr val="F7EDD4"/>
                       </a:solidFill>
                       <a:prstDash val="solid"/>
                     </a:lnL>
                     <a:lnR w="9525" cap="flat" cmpd="sng" algn="ctr">
                       <a:solidFill>
-                        <a:srgbClr val="F5E9CC"/>
+                        <a:srgbClr val="F7EDD4"/>
                       </a:solidFill>
                       <a:prstDash val="solid"/>
                     </a:lnR>
                     <a:lnT w="9525" cap="flat" cmpd="sng" algn="ctr">
                       <a:solidFill>
-                        <a:srgbClr val="F5E9CC"/>
+                        <a:srgbClr val="F7EDD4"/>
                       </a:solidFill>
                       <a:prstDash val="solid"/>
                     </a:lnT>
                     <a:lnB w="9525" cap="flat" cmpd="sng" algn="ctr">
                       <a:solidFill>
-                        <a:srgbClr val="F5E9CC"/>
+                        <a:srgbClr val="F7EDD4"/>
                       </a:solidFill>
                       <a:prstDash val="solid"/>
                     </a:lnB>
@@ -6191,25 +6191,25 @@
                   <a:tcPr anchor="ctr" marL="73152" marR="73152">
                     <a:lnL w="9525" cap="flat" cmpd="sng" algn="ctr">
                       <a:solidFill>
-                        <a:srgbClr val="F5E9CC"/>
+                        <a:srgbClr val="F7EDD4"/>
                       </a:solidFill>
                       <a:prstDash val="solid"/>
                     </a:lnL>
                     <a:lnR w="9525" cap="flat" cmpd="sng" algn="ctr">
                       <a:solidFill>
-                        <a:srgbClr val="F5E9CC"/>
+                        <a:srgbClr val="F7EDD4"/>
                       </a:solidFill>
                       <a:prstDash val="solid"/>
                     </a:lnR>
                     <a:lnT w="9525" cap="flat" cmpd="sng" algn="ctr">
                       <a:solidFill>
-                        <a:srgbClr val="F5E9CC"/>
+                        <a:srgbClr val="F7EDD4"/>
                       </a:solidFill>
                       <a:prstDash val="solid"/>
                     </a:lnT>
                     <a:lnB w="9525" cap="flat" cmpd="sng" algn="ctr">
                       <a:solidFill>
-                        <a:srgbClr val="F5E9CC"/>
+                        <a:srgbClr val="F7EDD4"/>
                       </a:solidFill>
                       <a:prstDash val="solid"/>
                     </a:lnB>
@@ -6229,7 +6229,7 @@
                       <a:r>
                         <a:rPr sz="1500" b="1">
                           <a:solidFill>
-                            <a:srgbClr val="74591B"/>
+                            <a:srgbClr val="72591D"/>
                           </a:solidFill>
                         </a:rPr>
                         <a:t>4</a:t>
@@ -6239,30 +6239,30 @@
                   <a:tcPr anchor="ctr" marL="73152" marR="73152">
                     <a:lnL w="9525" cap="flat" cmpd="sng" algn="ctr">
                       <a:solidFill>
-                        <a:srgbClr val="F5E9CC"/>
+                        <a:srgbClr val="F7EDD4"/>
                       </a:solidFill>
                       <a:prstDash val="solid"/>
                     </a:lnL>
                     <a:lnR w="9525" cap="flat" cmpd="sng" algn="ctr">
                       <a:solidFill>
-                        <a:srgbClr val="F5E9CC"/>
+                        <a:srgbClr val="F7EDD4"/>
                       </a:solidFill>
                       <a:prstDash val="solid"/>
                     </a:lnR>
                     <a:lnT w="9525" cap="flat" cmpd="sng" algn="ctr">
                       <a:solidFill>
-                        <a:srgbClr val="F5E9CC"/>
+                        <a:srgbClr val="F7EDD4"/>
                       </a:solidFill>
                       <a:prstDash val="solid"/>
                     </a:lnT>
                     <a:lnB w="9525" cap="flat" cmpd="sng" algn="ctr">
                       <a:solidFill>
-                        <a:srgbClr val="F5E9CC"/>
+                        <a:srgbClr val="F7EDD4"/>
                       </a:solidFill>
                       <a:prstDash val="solid"/>
                     </a:lnB>
                     <a:solidFill>
-                      <a:srgbClr val="F5E9CC"/>
+                      <a:srgbClr val="F7EDD4"/>
                     </a:solidFill>
                   </a:tcPr>
                 </a:tc>
@@ -6285,30 +6285,30 @@
                   <a:tcPr anchor="ctr" marL="73152" marR="73152">
                     <a:lnL w="9525" cap="flat" cmpd="sng" algn="ctr">
                       <a:solidFill>
-                        <a:srgbClr val="F5E9CC"/>
+                        <a:srgbClr val="F7EDD4"/>
                       </a:solidFill>
                       <a:prstDash val="solid"/>
                     </a:lnL>
                     <a:lnR w="9525" cap="flat" cmpd="sng" algn="ctr">
                       <a:solidFill>
-                        <a:srgbClr val="F5E9CC"/>
+                        <a:srgbClr val="F7EDD4"/>
                       </a:solidFill>
                       <a:prstDash val="solid"/>
                     </a:lnR>
                     <a:lnT w="9525" cap="flat" cmpd="sng" algn="ctr">
                       <a:solidFill>
-                        <a:srgbClr val="F5E9CC"/>
+                        <a:srgbClr val="F7EDD4"/>
                       </a:solidFill>
                       <a:prstDash val="solid"/>
                     </a:lnT>
                     <a:lnB w="9525" cap="flat" cmpd="sng" algn="ctr">
                       <a:solidFill>
-                        <a:srgbClr val="F5E9CC"/>
+                        <a:srgbClr val="F7EDD4"/>
                       </a:solidFill>
                       <a:prstDash val="solid"/>
                     </a:lnB>
                     <a:solidFill>
-                      <a:srgbClr val="FBF7EE"/>
+                      <a:srgbClr val="FCF9F3"/>
                     </a:solidFill>
                   </a:tcPr>
                 </a:tc>
@@ -6331,30 +6331,30 @@
                   <a:tcPr anchor="ctr" marL="73152" marR="73152">
                     <a:lnL w="9525" cap="flat" cmpd="sng" algn="ctr">
                       <a:solidFill>
-                        <a:srgbClr val="F5E9CC"/>
+                        <a:srgbClr val="F7EDD4"/>
                       </a:solidFill>
                       <a:prstDash val="solid"/>
                     </a:lnL>
                     <a:lnR w="9525" cap="flat" cmpd="sng" algn="ctr">
                       <a:solidFill>
-                        <a:srgbClr val="F5E9CC"/>
+                        <a:srgbClr val="F7EDD4"/>
                       </a:solidFill>
                       <a:prstDash val="solid"/>
                     </a:lnR>
                     <a:lnT w="9525" cap="flat" cmpd="sng" algn="ctr">
                       <a:solidFill>
-                        <a:srgbClr val="F5E9CC"/>
+                        <a:srgbClr val="F7EDD4"/>
                       </a:solidFill>
                       <a:prstDash val="solid"/>
                     </a:lnT>
                     <a:lnB w="9525" cap="flat" cmpd="sng" algn="ctr">
                       <a:solidFill>
-                        <a:srgbClr val="F5E9CC"/>
+                        <a:srgbClr val="F7EDD4"/>
                       </a:solidFill>
                       <a:prstDash val="solid"/>
                     </a:lnB>
                     <a:solidFill>
-                      <a:srgbClr val="FBF7EE"/>
+                      <a:srgbClr val="FCF9F3"/>
                     </a:solidFill>
                   </a:tcPr>
                 </a:tc>
@@ -6377,30 +6377,30 @@
                   <a:tcPr anchor="ctr" marL="73152" marR="73152">
                     <a:lnL w="9525" cap="flat" cmpd="sng" algn="ctr">
                       <a:solidFill>
-                        <a:srgbClr val="F5E9CC"/>
+                        <a:srgbClr val="F7EDD4"/>
                       </a:solidFill>
                       <a:prstDash val="solid"/>
                     </a:lnL>
                     <a:lnR w="9525" cap="flat" cmpd="sng" algn="ctr">
                       <a:solidFill>
-                        <a:srgbClr val="F5E9CC"/>
+                        <a:srgbClr val="F7EDD4"/>
                       </a:solidFill>
                       <a:prstDash val="solid"/>
                     </a:lnR>
                     <a:lnT w="9525" cap="flat" cmpd="sng" algn="ctr">
                       <a:solidFill>
-                        <a:srgbClr val="F5E9CC"/>
+                        <a:srgbClr val="F7EDD4"/>
                       </a:solidFill>
                       <a:prstDash val="solid"/>
                     </a:lnT>
                     <a:lnB w="9525" cap="flat" cmpd="sng" algn="ctr">
                       <a:solidFill>
-                        <a:srgbClr val="F5E9CC"/>
+                        <a:srgbClr val="F7EDD4"/>
                       </a:solidFill>
                       <a:prstDash val="solid"/>
                     </a:lnB>
                     <a:solidFill>
-                      <a:srgbClr val="FBF7EE"/>
+                      <a:srgbClr val="FCF9F3"/>
                     </a:solidFill>
                   </a:tcPr>
                 </a:tc>
@@ -6415,7 +6415,7 @@
                       <a:r>
                         <a:rPr sz="1500" b="1">
                           <a:solidFill>
-                            <a:srgbClr val="74591B"/>
+                            <a:srgbClr val="72591D"/>
                           </a:solidFill>
                         </a:rPr>
                         <a:t>5</a:t>
@@ -6425,30 +6425,30 @@
                   <a:tcPr anchor="ctr" marL="73152" marR="73152">
                     <a:lnL w="9525" cap="flat" cmpd="sng" algn="ctr">
                       <a:solidFill>
-                        <a:srgbClr val="F5E9CC"/>
+                        <a:srgbClr val="F7EDD4"/>
                       </a:solidFill>
                       <a:prstDash val="solid"/>
                     </a:lnL>
                     <a:lnR w="9525" cap="flat" cmpd="sng" algn="ctr">
                       <a:solidFill>
-                        <a:srgbClr val="F5E9CC"/>
+                        <a:srgbClr val="F7EDD4"/>
                       </a:solidFill>
                       <a:prstDash val="solid"/>
                     </a:lnR>
                     <a:lnT w="9525" cap="flat" cmpd="sng" algn="ctr">
                       <a:solidFill>
-                        <a:srgbClr val="F5E9CC"/>
+                        <a:srgbClr val="F7EDD4"/>
                       </a:solidFill>
                       <a:prstDash val="solid"/>
                     </a:lnT>
                     <a:lnB w="9525" cap="flat" cmpd="sng" algn="ctr">
                       <a:solidFill>
-                        <a:srgbClr val="F5E9CC"/>
+                        <a:srgbClr val="F7EDD4"/>
                       </a:solidFill>
                       <a:prstDash val="solid"/>
                     </a:lnB>
                     <a:solidFill>
-                      <a:srgbClr val="F5E9CC"/>
+                      <a:srgbClr val="F7EDD4"/>
                     </a:solidFill>
                   </a:tcPr>
                 </a:tc>
@@ -6471,25 +6471,25 @@
                   <a:tcPr anchor="ctr" marL="73152" marR="73152">
                     <a:lnL w="9525" cap="flat" cmpd="sng" algn="ctr">
                       <a:solidFill>
-                        <a:srgbClr val="F5E9CC"/>
+                        <a:srgbClr val="F7EDD4"/>
                       </a:solidFill>
                       <a:prstDash val="solid"/>
                     </a:lnL>
                     <a:lnR w="9525" cap="flat" cmpd="sng" algn="ctr">
                       <a:solidFill>
-                        <a:srgbClr val="F5E9CC"/>
+                        <a:srgbClr val="F7EDD4"/>
                       </a:solidFill>
                       <a:prstDash val="solid"/>
                     </a:lnR>
                     <a:lnT w="9525" cap="flat" cmpd="sng" algn="ctr">
                       <a:solidFill>
-                        <a:srgbClr val="F5E9CC"/>
+                        <a:srgbClr val="F7EDD4"/>
                       </a:solidFill>
                       <a:prstDash val="solid"/>
                     </a:lnT>
                     <a:lnB w="9525" cap="flat" cmpd="sng" algn="ctr">
                       <a:solidFill>
-                        <a:srgbClr val="F5E9CC"/>
+                        <a:srgbClr val="F7EDD4"/>
                       </a:solidFill>
                       <a:prstDash val="solid"/>
                     </a:lnB>
@@ -6517,25 +6517,25 @@
                   <a:tcPr anchor="ctr" marL="73152" marR="73152">
                     <a:lnL w="9525" cap="flat" cmpd="sng" algn="ctr">
                       <a:solidFill>
-                        <a:srgbClr val="F5E9CC"/>
+                        <a:srgbClr val="F7EDD4"/>
                       </a:solidFill>
                       <a:prstDash val="solid"/>
                     </a:lnL>
                     <a:lnR w="9525" cap="flat" cmpd="sng" algn="ctr">
                       <a:solidFill>
-                        <a:srgbClr val="F5E9CC"/>
+                        <a:srgbClr val="F7EDD4"/>
                       </a:solidFill>
                       <a:prstDash val="solid"/>
                     </a:lnR>
                     <a:lnT w="9525" cap="flat" cmpd="sng" algn="ctr">
                       <a:solidFill>
-                        <a:srgbClr val="F5E9CC"/>
+                        <a:srgbClr val="F7EDD4"/>
                       </a:solidFill>
                       <a:prstDash val="solid"/>
                     </a:lnT>
                     <a:lnB w="9525" cap="flat" cmpd="sng" algn="ctr">
                       <a:solidFill>
-                        <a:srgbClr val="F5E9CC"/>
+                        <a:srgbClr val="F7EDD4"/>
                       </a:solidFill>
                       <a:prstDash val="solid"/>
                     </a:lnB>
@@ -6563,25 +6563,25 @@
                   <a:tcPr anchor="ctr" marL="73152" marR="73152">
                     <a:lnL w="9525" cap="flat" cmpd="sng" algn="ctr">
                       <a:solidFill>
-                        <a:srgbClr val="F5E9CC"/>
+                        <a:srgbClr val="F7EDD4"/>
                       </a:solidFill>
                       <a:prstDash val="solid"/>
                     </a:lnL>
                     <a:lnR w="9525" cap="flat" cmpd="sng" algn="ctr">
                       <a:solidFill>
-                        <a:srgbClr val="F5E9CC"/>
+                        <a:srgbClr val="F7EDD4"/>
                       </a:solidFill>
                       <a:prstDash val="solid"/>
                     </a:lnR>
                     <a:lnT w="9525" cap="flat" cmpd="sng" algn="ctr">
                       <a:solidFill>
-                        <a:srgbClr val="F5E9CC"/>
+                        <a:srgbClr val="F7EDD4"/>
                       </a:solidFill>
                       <a:prstDash val="solid"/>
                     </a:lnT>
                     <a:lnB w="9525" cap="flat" cmpd="sng" algn="ctr">
                       <a:solidFill>
-                        <a:srgbClr val="F5E9CC"/>
+                        <a:srgbClr val="F7EDD4"/>
                       </a:solidFill>
                       <a:prstDash val="solid"/>
                     </a:lnB>
@@ -6667,7 +6667,7 @@
             <a:r>
               <a:rPr sz="3600" b="1" i="0">
                 <a:solidFill>
-                  <a:srgbClr val="74591B"/>
+                  <a:srgbClr val="72591D"/>
                 </a:solidFill>
               </a:rPr>
               <a:t>감사합니다</a:t>
@@ -6705,7 +6705,7 @@
             <a:r>
               <a:rPr sz="1700" b="0" i="1">
                 <a:solidFill>
-                  <a:srgbClr val="74591B"/>
+                  <a:srgbClr val="72591D"/>
                 </a:solidFill>
               </a:rPr>
               <a:t>끝까지 들어 주셔서 고맙습니다</a:t>
@@ -6770,34 +6770,34 @@
         <a:sysClr val="window" lastClr="FFFFFF"/>
       </a:lt1>
       <a:dk2>
-        <a:srgbClr val="74591B"/>
+        <a:srgbClr val="72591D"/>
       </a:dk2>
       <a:lt2>
-        <a:srgbClr val="FBF7EE"/>
+        <a:srgbClr val="FCF9F3"/>
       </a:lt2>
       <a:accent1>
-        <a:srgbClr val="C6992F"/>
+        <a:srgbClr val="DFAD3A"/>
       </a:accent1>
       <a:accent2>
-        <a:srgbClr val="3B8091"/>
+        <a:srgbClr val="339941"/>
       </a:accent2>
       <a:accent3>
-        <a:srgbClr val="74591B"/>
+        <a:srgbClr val="72591D"/>
       </a:accent3>
       <a:accent4>
-        <a:srgbClr val="F5E9CC"/>
+        <a:srgbClr val="F7EDD4"/>
       </a:accent4>
       <a:accent5>
-        <a:srgbClr val="808C60"/>
+        <a:srgbClr val="89A33E"/>
       </a:accent5>
       <a:accent6>
-        <a:srgbClr val="AC9B76"/>
+        <a:srgbClr val="AA9B77"/>
       </a:accent6>
       <a:hlink>
-        <a:srgbClr val="C6992F"/>
+        <a:srgbClr val="DFAD3A"/>
       </a:hlink>
       <a:folHlink>
-        <a:srgbClr val="74591B"/>
+        <a:srgbClr val="72591D"/>
       </a:folHlink>
     </a:clrScheme>
     <a:fontScheme name="Office">
